--- a/문제해결프로그래밍_숙제/제출용/숙제5_2022182035.pptx
+++ b/문제해결프로그래밍_숙제/제출용/숙제5_2022182035.pptx
@@ -5,7 +5,7 @@
     <p:sldMasterId id="2147483670" r:id="rId1"/>
   </p:sldMasterIdLst>
   <p:notesMasterIdLst>
-    <p:notesMasterId r:id="rId9"/>
+    <p:notesMasterId r:id="rId7"/>
   </p:notesMasterIdLst>
   <p:sldIdLst>
     <p:sldId id="256" r:id="rId2"/>
@@ -13,23 +13,21 @@
     <p:sldId id="258" r:id="rId4"/>
     <p:sldId id="259" r:id="rId5"/>
     <p:sldId id="260" r:id="rId6"/>
-    <p:sldId id="261" r:id="rId7"/>
-    <p:sldId id="262" r:id="rId8"/>
   </p:sldIdLst>
   <p:sldSz cx="9144000" cy="5143500" type="screen16x9"/>
   <p:notesSz cx="6858000" cy="9144000"/>
   <p:embeddedFontLst>
     <p:embeddedFont>
       <p:font typeface="Jost" panose="020B0600000101010101" charset="0"/>
-      <p:regular r:id="rId10"/>
-      <p:bold r:id="rId11"/>
-      <p:italic r:id="rId12"/>
-      <p:boldItalic r:id="rId13"/>
+      <p:regular r:id="rId8"/>
+      <p:bold r:id="rId9"/>
+      <p:italic r:id="rId10"/>
+      <p:boldItalic r:id="rId11"/>
     </p:embeddedFont>
     <p:embeddedFont>
       <p:font typeface="Palanquin Dark" panose="020B0600000101010101" charset="0"/>
-      <p:regular r:id="rId14"/>
-      <p:bold r:id="rId15"/>
+      <p:regular r:id="rId12"/>
+      <p:bold r:id="rId13"/>
     </p:embeddedFont>
   </p:embeddedFontLst>
   <p:defaultTextStyle>
@@ -1324,260 +1322,6 @@
     <p:extLst>
       <p:ext uri="{BB962C8B-B14F-4D97-AF65-F5344CB8AC3E}">
         <p14:creationId xmlns:p14="http://schemas.microsoft.com/office/powerpoint/2010/main" val="682162643"/>
-      </p:ext>
-    </p:extLst>
-  </p:cSld>
-  <p:clrMapOvr>
-    <a:masterClrMapping/>
-  </p:clrMapOvr>
-</p:notes>
-</file>
-
-<file path=ppt/notesSlides/notesSlide6.xml><?xml version="1.0" encoding="utf-8"?>
-<p:notes xmlns:a="http://schemas.openxmlformats.org/drawingml/2006/main" xmlns:r="http://schemas.openxmlformats.org/officeDocument/2006/relationships" xmlns:p="http://schemas.openxmlformats.org/presentationml/2006/main" showMasterSp="0" showMasterPhAnim="0">
-  <p:cSld>
-    <p:spTree>
-      <p:nvGrpSpPr>
-        <p:cNvPr id="1" name="Shape 431">
-          <a:extLst>
-            <a:ext uri="{FF2B5EF4-FFF2-40B4-BE49-F238E27FC236}">
-              <a16:creationId xmlns:a16="http://schemas.microsoft.com/office/drawing/2014/main" id="{A651A226-C7E1-9E92-77E2-57EB51B57075}"/>
-            </a:ext>
-          </a:extLst>
-        </p:cNvPr>
-        <p:cNvGrpSpPr/>
-        <p:nvPr/>
-      </p:nvGrpSpPr>
-      <p:grpSpPr>
-        <a:xfrm>
-          <a:off x="0" y="0"/>
-          <a:ext cx="0" cy="0"/>
-          <a:chOff x="0" y="0"/>
-          <a:chExt cx="0" cy="0"/>
-        </a:xfrm>
-      </p:grpSpPr>
-      <p:sp>
-        <p:nvSpPr>
-          <p:cNvPr id="432" name="Google Shape;432;g3cf4798b604_0_426:notes">
-            <a:extLst>
-              <a:ext uri="{FF2B5EF4-FFF2-40B4-BE49-F238E27FC236}">
-                <a16:creationId xmlns:a16="http://schemas.microsoft.com/office/drawing/2014/main" id="{6B49EDD2-FA63-262B-3BC4-F21A26EED380}"/>
-              </a:ext>
-            </a:extLst>
-          </p:cNvPr>
-          <p:cNvSpPr>
-            <a:spLocks noGrp="1" noRot="1" noChangeAspect="1"/>
-          </p:cNvSpPr>
-          <p:nvPr>
-            <p:ph type="sldImg" idx="2"/>
-          </p:nvPr>
-        </p:nvSpPr>
-        <p:spPr>
-          <a:xfrm>
-            <a:off x="381000" y="685800"/>
-            <a:ext cx="6096000" cy="3429000"/>
-          </a:xfrm>
-          <a:custGeom>
-            <a:avLst/>
-            <a:gdLst/>
-            <a:ahLst/>
-            <a:cxnLst/>
-            <a:rect l="l" t="t" r="r" b="b"/>
-            <a:pathLst>
-              <a:path w="120000" h="120000" extrusionOk="0">
-                <a:moveTo>
-                  <a:pt x="0" y="0"/>
-                </a:moveTo>
-                <a:lnTo>
-                  <a:pt x="120000" y="0"/>
-                </a:lnTo>
-                <a:lnTo>
-                  <a:pt x="120000" y="120000"/>
-                </a:lnTo>
-                <a:lnTo>
-                  <a:pt x="0" y="120000"/>
-                </a:lnTo>
-                <a:close/>
-              </a:path>
-            </a:pathLst>
-          </a:custGeom>
-        </p:spPr>
-      </p:sp>
-      <p:sp>
-        <p:nvSpPr>
-          <p:cNvPr id="433" name="Google Shape;433;g3cf4798b604_0_426:notes">
-            <a:extLst>
-              <a:ext uri="{FF2B5EF4-FFF2-40B4-BE49-F238E27FC236}">
-                <a16:creationId xmlns:a16="http://schemas.microsoft.com/office/drawing/2014/main" id="{A0ACBD59-3151-20CC-5F31-CF20ACD3A8F4}"/>
-              </a:ext>
-            </a:extLst>
-          </p:cNvPr>
-          <p:cNvSpPr txBox="1">
-            <a:spLocks noGrp="1"/>
-          </p:cNvSpPr>
-          <p:nvPr>
-            <p:ph type="body" idx="1"/>
-          </p:nvPr>
-        </p:nvSpPr>
-        <p:spPr>
-          <a:xfrm>
-            <a:off x="685800" y="4343400"/>
-            <a:ext cx="5486400" cy="4114800"/>
-          </a:xfrm>
-          <a:prstGeom prst="rect">
-            <a:avLst/>
-          </a:prstGeom>
-        </p:spPr>
-        <p:txBody>
-          <a:bodyPr spcFirstLastPara="1" wrap="square" lIns="91425" tIns="91425" rIns="91425" bIns="91425" anchor="t" anchorCtr="0">
-            <a:noAutofit/>
-          </a:bodyPr>
-          <a:lstStyle/>
-          <a:p>
-            <a:pPr marL="0" lvl="0" indent="0" algn="l" rtl="0">
-              <a:spcBef>
-                <a:spcPts val="0"/>
-              </a:spcBef>
-              <a:spcAft>
-                <a:spcPts val="0"/>
-              </a:spcAft>
-              <a:buNone/>
-            </a:pPr>
-            <a:endParaRPr/>
-          </a:p>
-        </p:txBody>
-      </p:sp>
-    </p:spTree>
-    <p:extLst>
-      <p:ext uri="{BB962C8B-B14F-4D97-AF65-F5344CB8AC3E}">
-        <p14:creationId xmlns:p14="http://schemas.microsoft.com/office/powerpoint/2010/main" val="362914310"/>
-      </p:ext>
-    </p:extLst>
-  </p:cSld>
-  <p:clrMapOvr>
-    <a:masterClrMapping/>
-  </p:clrMapOvr>
-</p:notes>
-</file>
-
-<file path=ppt/notesSlides/notesSlide7.xml><?xml version="1.0" encoding="utf-8"?>
-<p:notes xmlns:a="http://schemas.openxmlformats.org/drawingml/2006/main" xmlns:r="http://schemas.openxmlformats.org/officeDocument/2006/relationships" xmlns:p="http://schemas.openxmlformats.org/presentationml/2006/main" showMasterSp="0" showMasterPhAnim="0">
-  <p:cSld>
-    <p:spTree>
-      <p:nvGrpSpPr>
-        <p:cNvPr id="1" name="Shape 431">
-          <a:extLst>
-            <a:ext uri="{FF2B5EF4-FFF2-40B4-BE49-F238E27FC236}">
-              <a16:creationId xmlns:a16="http://schemas.microsoft.com/office/drawing/2014/main" id="{E35CB906-B1C7-1EBE-8058-7B9F28563C2F}"/>
-            </a:ext>
-          </a:extLst>
-        </p:cNvPr>
-        <p:cNvGrpSpPr/>
-        <p:nvPr/>
-      </p:nvGrpSpPr>
-      <p:grpSpPr>
-        <a:xfrm>
-          <a:off x="0" y="0"/>
-          <a:ext cx="0" cy="0"/>
-          <a:chOff x="0" y="0"/>
-          <a:chExt cx="0" cy="0"/>
-        </a:xfrm>
-      </p:grpSpPr>
-      <p:sp>
-        <p:nvSpPr>
-          <p:cNvPr id="432" name="Google Shape;432;g3cf4798b604_0_426:notes">
-            <a:extLst>
-              <a:ext uri="{FF2B5EF4-FFF2-40B4-BE49-F238E27FC236}">
-                <a16:creationId xmlns:a16="http://schemas.microsoft.com/office/drawing/2014/main" id="{74C03AAF-F486-7973-7E95-5875AA5881C8}"/>
-              </a:ext>
-            </a:extLst>
-          </p:cNvPr>
-          <p:cNvSpPr>
-            <a:spLocks noGrp="1" noRot="1" noChangeAspect="1"/>
-          </p:cNvSpPr>
-          <p:nvPr>
-            <p:ph type="sldImg" idx="2"/>
-          </p:nvPr>
-        </p:nvSpPr>
-        <p:spPr>
-          <a:xfrm>
-            <a:off x="381000" y="685800"/>
-            <a:ext cx="6096000" cy="3429000"/>
-          </a:xfrm>
-          <a:custGeom>
-            <a:avLst/>
-            <a:gdLst/>
-            <a:ahLst/>
-            <a:cxnLst/>
-            <a:rect l="l" t="t" r="r" b="b"/>
-            <a:pathLst>
-              <a:path w="120000" h="120000" extrusionOk="0">
-                <a:moveTo>
-                  <a:pt x="0" y="0"/>
-                </a:moveTo>
-                <a:lnTo>
-                  <a:pt x="120000" y="0"/>
-                </a:lnTo>
-                <a:lnTo>
-                  <a:pt x="120000" y="120000"/>
-                </a:lnTo>
-                <a:lnTo>
-                  <a:pt x="0" y="120000"/>
-                </a:lnTo>
-                <a:close/>
-              </a:path>
-            </a:pathLst>
-          </a:custGeom>
-        </p:spPr>
-      </p:sp>
-      <p:sp>
-        <p:nvSpPr>
-          <p:cNvPr id="433" name="Google Shape;433;g3cf4798b604_0_426:notes">
-            <a:extLst>
-              <a:ext uri="{FF2B5EF4-FFF2-40B4-BE49-F238E27FC236}">
-                <a16:creationId xmlns:a16="http://schemas.microsoft.com/office/drawing/2014/main" id="{2CF0D1AA-9EAF-88F1-05B6-E556B486D936}"/>
-              </a:ext>
-            </a:extLst>
-          </p:cNvPr>
-          <p:cNvSpPr txBox="1">
-            <a:spLocks noGrp="1"/>
-          </p:cNvSpPr>
-          <p:nvPr>
-            <p:ph type="body" idx="1"/>
-          </p:nvPr>
-        </p:nvSpPr>
-        <p:spPr>
-          <a:xfrm>
-            <a:off x="685800" y="4343400"/>
-            <a:ext cx="5486400" cy="4114800"/>
-          </a:xfrm>
-          <a:prstGeom prst="rect">
-            <a:avLst/>
-          </a:prstGeom>
-        </p:spPr>
-        <p:txBody>
-          <a:bodyPr spcFirstLastPara="1" wrap="square" lIns="91425" tIns="91425" rIns="91425" bIns="91425" anchor="t" anchorCtr="0">
-            <a:noAutofit/>
-          </a:bodyPr>
-          <a:lstStyle/>
-          <a:p>
-            <a:pPr marL="0" lvl="0" indent="0" algn="l" rtl="0">
-              <a:spcBef>
-                <a:spcPts val="0"/>
-              </a:spcBef>
-              <a:spcAft>
-                <a:spcPts val="0"/>
-              </a:spcAft>
-              <a:buNone/>
-            </a:pPr>
-            <a:endParaRPr/>
-          </a:p>
-        </p:txBody>
-      </p:sp>
-    </p:spTree>
-    <p:extLst>
-      <p:ext uri="{BB962C8B-B14F-4D97-AF65-F5344CB8AC3E}">
-        <p14:creationId xmlns:p14="http://schemas.microsoft.com/office/powerpoint/2010/main" val="2067769389"/>
       </p:ext>
     </p:extLst>
   </p:cSld>
@@ -34248,23 +33992,111 @@
           </a:bodyPr>
           <a:lstStyle/>
           <a:p>
-            <a:pPr marL="50800" lvl="0" algn="ctr" rtl="0">
-              <a:spcBef>
-                <a:spcPts val="0"/>
-              </a:spcBef>
-              <a:spcAft>
-                <a:spcPts val="0"/>
-              </a:spcAft>
-              <a:buSzPts val="2800"/>
-            </a:pPr>
+            <a:pPr marL="50800" lvl="0"/>
             <a:r>
               <a:rPr lang="en-US" dirty="0"/>
               <a:t>2. </a:t>
+            </a:r>
+            <a:r>
+              <a:rPr lang="ko-KR" altLang="en-US" dirty="0"/>
+              <a:t>사칙연산</a:t>
+            </a:r>
+            <a:r>
+              <a:rPr lang="en-US" altLang="ko-KR" dirty="0"/>
+              <a:t>(</a:t>
+            </a:r>
+            <a:r>
+              <a:rPr lang="en-US" altLang="ko-KR" dirty="0" err="1"/>
+              <a:t>TUKorea</a:t>
+            </a:r>
+            <a:r>
+              <a:rPr lang="en-US" altLang="ko-KR" dirty="0"/>
+              <a:t>, </a:t>
+            </a:r>
+            <a:r>
+              <a:rPr lang="ko-KR" altLang="en-US" dirty="0"/>
+              <a:t>백준</a:t>
+            </a:r>
+            <a:r>
+              <a:rPr lang="en-US" altLang="ko-KR" dirty="0"/>
+              <a:t>, </a:t>
+            </a:r>
+            <a:r>
+              <a:rPr lang="ko-KR" altLang="en-US" dirty="0"/>
+              <a:t>구현</a:t>
+            </a:r>
+            <a:r>
+              <a:rPr lang="en-US" altLang="ko-KR" dirty="0"/>
+              <a:t>)</a:t>
+            </a:r>
+            <a:r>
+              <a:rPr lang="en-US" dirty="0"/>
+              <a:t> </a:t>
             </a:r>
             <a:endParaRPr dirty="0"/>
           </a:p>
         </p:txBody>
       </p:sp>
+      <p:pic>
+        <p:nvPicPr>
+          <p:cNvPr id="3" name="그림 2">
+            <a:extLst>
+              <a:ext uri="{FF2B5EF4-FFF2-40B4-BE49-F238E27FC236}">
+                <a16:creationId xmlns:a16="http://schemas.microsoft.com/office/drawing/2014/main" id="{81F36170-F518-AD6D-15D6-388E46D1836E}"/>
+              </a:ext>
+            </a:extLst>
+          </p:cNvPr>
+          <p:cNvPicPr>
+            <a:picLocks noChangeAspect="1"/>
+          </p:cNvPicPr>
+          <p:nvPr/>
+        </p:nvPicPr>
+        <p:blipFill>
+          <a:blip r:embed="rId3"/>
+          <a:stretch>
+            <a:fillRect/>
+          </a:stretch>
+        </p:blipFill>
+        <p:spPr>
+          <a:xfrm>
+            <a:off x="893252" y="1009000"/>
+            <a:ext cx="2571652" cy="3722914"/>
+          </a:xfrm>
+          <a:prstGeom prst="rect">
+            <a:avLst/>
+          </a:prstGeom>
+        </p:spPr>
+      </p:pic>
+      <p:pic>
+        <p:nvPicPr>
+          <p:cNvPr id="5" name="그림 4">
+            <a:extLst>
+              <a:ext uri="{FF2B5EF4-FFF2-40B4-BE49-F238E27FC236}">
+                <a16:creationId xmlns:a16="http://schemas.microsoft.com/office/drawing/2014/main" id="{F3E772CA-5F13-E22F-E183-93D49E4477BC}"/>
+              </a:ext>
+            </a:extLst>
+          </p:cNvPr>
+          <p:cNvPicPr>
+            <a:picLocks noChangeAspect="1"/>
+          </p:cNvPicPr>
+          <p:nvPr/>
+        </p:nvPicPr>
+        <p:blipFill>
+          <a:blip r:embed="rId4"/>
+          <a:stretch>
+            <a:fillRect/>
+          </a:stretch>
+        </p:blipFill>
+        <p:spPr>
+          <a:xfrm>
+            <a:off x="3649082" y="2447467"/>
+            <a:ext cx="5119007" cy="845980"/>
+          </a:xfrm>
+          <a:prstGeom prst="rect">
+            <a:avLst/>
+          </a:prstGeom>
+        </p:spPr>
+      </p:pic>
     </p:spTree>
     <p:extLst>
       <p:ext uri="{BB962C8B-B14F-4D97-AF65-F5344CB8AC3E}">
@@ -34500,195 +34332,142 @@
           </a:bodyPr>
           <a:lstStyle/>
           <a:p>
-            <a:pPr marL="50800" lvl="0" algn="ctr" rtl="0">
-              <a:spcBef>
-                <a:spcPts val="0"/>
-              </a:spcBef>
-              <a:spcAft>
-                <a:spcPts val="0"/>
-              </a:spcAft>
-              <a:buSzPts val="2800"/>
-            </a:pPr>
+            <a:pPr marL="50800" lvl="0"/>
             <a:r>
               <a:rPr lang="en-US" dirty="0"/>
               <a:t>5. </a:t>
+            </a:r>
+            <a:r>
+              <a:rPr lang="ko-KR" altLang="en-US" dirty="0"/>
+              <a:t>어두운 굴다리</a:t>
+            </a:r>
+            <a:r>
+              <a:rPr lang="en-US" altLang="ko-KR" dirty="0"/>
+              <a:t>(</a:t>
+            </a:r>
+            <a:r>
+              <a:rPr lang="en-US" altLang="ko-KR" dirty="0" err="1"/>
+              <a:t>TUKorea</a:t>
+            </a:r>
+            <a:r>
+              <a:rPr lang="en-US" altLang="ko-KR" dirty="0"/>
+              <a:t>, </a:t>
+            </a:r>
+            <a:r>
+              <a:rPr lang="ko-KR" altLang="en-US" dirty="0"/>
+              <a:t>백준</a:t>
+            </a:r>
+            <a:r>
+              <a:rPr lang="en-US" altLang="ko-KR" dirty="0"/>
+              <a:t>, </a:t>
+            </a:r>
+            <a:r>
+              <a:rPr lang="ko-KR" altLang="en-US" dirty="0"/>
+              <a:t>이분탐색</a:t>
+            </a:r>
+            <a:r>
+              <a:rPr lang="en-US" altLang="ko-KR" dirty="0"/>
+              <a:t>)</a:t>
             </a:r>
             <a:endParaRPr dirty="0"/>
           </a:p>
         </p:txBody>
       </p:sp>
-    </p:spTree>
-    <p:extLst>
-      <p:ext uri="{BB962C8B-B14F-4D97-AF65-F5344CB8AC3E}">
-        <p14:creationId xmlns:p14="http://schemas.microsoft.com/office/powerpoint/2010/main" val="817275800"/>
-      </p:ext>
-    </p:extLst>
-  </p:cSld>
-  <p:clrMapOvr>
-    <a:masterClrMapping/>
-  </p:clrMapOvr>
-</p:sld>
-</file>
-
-<file path=ppt/slides/slide6.xml><?xml version="1.0" encoding="utf-8"?>
-<p:sld xmlns:a="http://schemas.openxmlformats.org/drawingml/2006/main" xmlns:r="http://schemas.openxmlformats.org/officeDocument/2006/relationships" xmlns:p="http://schemas.openxmlformats.org/presentationml/2006/main">
-  <p:cSld>
-    <p:spTree>
-      <p:nvGrpSpPr>
-        <p:cNvPr id="1" name="Shape 434">
-          <a:extLst>
-            <a:ext uri="{FF2B5EF4-FFF2-40B4-BE49-F238E27FC236}">
-              <a16:creationId xmlns:a16="http://schemas.microsoft.com/office/drawing/2014/main" id="{C49BA4F5-64A4-80A1-8EEF-D567FBAA9007}"/>
-            </a:ext>
-          </a:extLst>
-        </p:cNvPr>
-        <p:cNvGrpSpPr/>
-        <p:nvPr/>
-      </p:nvGrpSpPr>
-      <p:grpSpPr>
-        <a:xfrm>
-          <a:off x="0" y="0"/>
-          <a:ext cx="0" cy="0"/>
-          <a:chOff x="0" y="0"/>
-          <a:chExt cx="0" cy="0"/>
-        </a:xfrm>
-      </p:grpSpPr>
-      <p:sp>
-        <p:nvSpPr>
-          <p:cNvPr id="435" name="Google Shape;435;p24">
+      <p:pic>
+        <p:nvPicPr>
+          <p:cNvPr id="3" name="그림 2">
             <a:extLst>
               <a:ext uri="{FF2B5EF4-FFF2-40B4-BE49-F238E27FC236}">
-                <a16:creationId xmlns:a16="http://schemas.microsoft.com/office/drawing/2014/main" id="{22CEDD2E-D36E-1AD0-B231-8D45A4F97B7E}"/>
+                <a16:creationId xmlns:a16="http://schemas.microsoft.com/office/drawing/2014/main" id="{D1CDCA2F-41F9-5ECF-E2C8-83B6D900363D}"/>
               </a:ext>
             </a:extLst>
           </p:cNvPr>
-          <p:cNvSpPr txBox="1">
-            <a:spLocks noGrp="1"/>
-          </p:cNvSpPr>
-          <p:nvPr>
-            <p:ph type="title"/>
-          </p:nvPr>
-        </p:nvSpPr>
+          <p:cNvPicPr>
+            <a:picLocks noChangeAspect="1"/>
+          </p:cNvPicPr>
+          <p:nvPr/>
+        </p:nvPicPr>
+        <p:blipFill>
+          <a:blip r:embed="rId3"/>
+          <a:srcRect r="12693"/>
+          <a:stretch>
+            <a:fillRect/>
+          </a:stretch>
+        </p:blipFill>
         <p:spPr>
           <a:xfrm>
-            <a:off x="722388" y="362600"/>
-            <a:ext cx="7699200" cy="572700"/>
+            <a:off x="2308527" y="1390527"/>
+            <a:ext cx="2263473" cy="1778006"/>
           </a:xfrm>
           <a:prstGeom prst="rect">
             <a:avLst/>
           </a:prstGeom>
         </p:spPr>
-        <p:txBody>
-          <a:bodyPr spcFirstLastPara="1" wrap="square" lIns="91425" tIns="91425" rIns="91425" bIns="91425" anchor="t" anchorCtr="0">
-            <a:noAutofit/>
-          </a:bodyPr>
-          <a:lstStyle/>
-          <a:p>
-            <a:pPr marL="50800" lvl="0" algn="ctr" rtl="0">
-              <a:spcBef>
-                <a:spcPts val="0"/>
-              </a:spcBef>
-              <a:spcAft>
-                <a:spcPts val="0"/>
-              </a:spcAft>
-              <a:buSzPts val="2800"/>
-            </a:pPr>
-            <a:r>
-              <a:rPr lang="en-US" dirty="0"/>
-              <a:t>6. </a:t>
-            </a:r>
-            <a:endParaRPr dirty="0"/>
-          </a:p>
-        </p:txBody>
-      </p:sp>
-    </p:spTree>
-    <p:extLst>
-      <p:ext uri="{BB962C8B-B14F-4D97-AF65-F5344CB8AC3E}">
-        <p14:creationId xmlns:p14="http://schemas.microsoft.com/office/powerpoint/2010/main" val="2934289483"/>
-      </p:ext>
-    </p:extLst>
-  </p:cSld>
-  <p:clrMapOvr>
-    <a:masterClrMapping/>
-  </p:clrMapOvr>
-</p:sld>
-</file>
-
-<file path=ppt/slides/slide7.xml><?xml version="1.0" encoding="utf-8"?>
-<p:sld xmlns:a="http://schemas.openxmlformats.org/drawingml/2006/main" xmlns:r="http://schemas.openxmlformats.org/officeDocument/2006/relationships" xmlns:p="http://schemas.openxmlformats.org/presentationml/2006/main">
-  <p:cSld>
-    <p:spTree>
-      <p:nvGrpSpPr>
-        <p:cNvPr id="1" name="Shape 434">
-          <a:extLst>
-            <a:ext uri="{FF2B5EF4-FFF2-40B4-BE49-F238E27FC236}">
-              <a16:creationId xmlns:a16="http://schemas.microsoft.com/office/drawing/2014/main" id="{28A818DE-ADEE-A871-1CAA-DD3118DC9E45}"/>
-            </a:ext>
-          </a:extLst>
-        </p:cNvPr>
-        <p:cNvGrpSpPr/>
-        <p:nvPr/>
-      </p:nvGrpSpPr>
-      <p:grpSpPr>
-        <a:xfrm>
-          <a:off x="0" y="0"/>
-          <a:ext cx="0" cy="0"/>
-          <a:chOff x="0" y="0"/>
-          <a:chExt cx="0" cy="0"/>
-        </a:xfrm>
-      </p:grpSpPr>
-      <p:sp>
-        <p:nvSpPr>
-          <p:cNvPr id="435" name="Google Shape;435;p24">
+      </p:pic>
+      <p:pic>
+        <p:nvPicPr>
+          <p:cNvPr id="5" name="그림 4">
             <a:extLst>
               <a:ext uri="{FF2B5EF4-FFF2-40B4-BE49-F238E27FC236}">
-                <a16:creationId xmlns:a16="http://schemas.microsoft.com/office/drawing/2014/main" id="{90F1BF5E-8C4F-D989-24DF-95799A92E8BD}"/>
+                <a16:creationId xmlns:a16="http://schemas.microsoft.com/office/drawing/2014/main" id="{7B134EC3-9D5D-A4A7-076F-A25C43EA67DA}"/>
               </a:ext>
             </a:extLst>
           </p:cNvPr>
-          <p:cNvSpPr txBox="1">
-            <a:spLocks noGrp="1"/>
-          </p:cNvSpPr>
-          <p:nvPr>
-            <p:ph type="title"/>
-          </p:nvPr>
-        </p:nvSpPr>
+          <p:cNvPicPr>
+            <a:picLocks noChangeAspect="1"/>
+          </p:cNvPicPr>
+          <p:nvPr/>
+        </p:nvPicPr>
+        <p:blipFill>
+          <a:blip r:embed="rId4"/>
+          <a:stretch>
+            <a:fillRect/>
+          </a:stretch>
+        </p:blipFill>
         <p:spPr>
           <a:xfrm>
-            <a:off x="722388" y="362600"/>
-            <a:ext cx="7699200" cy="572700"/>
+            <a:off x="4924215" y="1074224"/>
+            <a:ext cx="2049956" cy="2552684"/>
           </a:xfrm>
           <a:prstGeom prst="rect">
             <a:avLst/>
           </a:prstGeom>
         </p:spPr>
-        <p:txBody>
-          <a:bodyPr spcFirstLastPara="1" wrap="square" lIns="91425" tIns="91425" rIns="91425" bIns="91425" anchor="t" anchorCtr="0">
-            <a:noAutofit/>
-          </a:bodyPr>
-          <a:lstStyle/>
-          <a:p>
-            <a:pPr marL="50800" lvl="0" algn="ctr" rtl="0">
-              <a:spcBef>
-                <a:spcPts val="0"/>
-              </a:spcBef>
-              <a:spcAft>
-                <a:spcPts val="0"/>
-              </a:spcAft>
-              <a:buSzPts val="2800"/>
-            </a:pPr>
-            <a:r>
-              <a:rPr lang="en-US" dirty="0"/>
-              <a:t>7. </a:t>
-            </a:r>
-            <a:endParaRPr dirty="0"/>
-          </a:p>
-        </p:txBody>
-      </p:sp>
+      </p:pic>
+      <p:pic>
+        <p:nvPicPr>
+          <p:cNvPr id="7" name="그림 6">
+            <a:extLst>
+              <a:ext uri="{FF2B5EF4-FFF2-40B4-BE49-F238E27FC236}">
+                <a16:creationId xmlns:a16="http://schemas.microsoft.com/office/drawing/2014/main" id="{51D75A2F-6DA4-B828-8C35-E37DB7D9B5D3}"/>
+              </a:ext>
+            </a:extLst>
+          </p:cNvPr>
+          <p:cNvPicPr>
+            <a:picLocks noChangeAspect="1"/>
+          </p:cNvPicPr>
+          <p:nvPr/>
+        </p:nvPicPr>
+        <p:blipFill>
+          <a:blip r:embed="rId5"/>
+          <a:stretch>
+            <a:fillRect/>
+          </a:stretch>
+        </p:blipFill>
+        <p:spPr>
+          <a:xfrm>
+            <a:off x="1187891" y="3765832"/>
+            <a:ext cx="6768193" cy="1161015"/>
+          </a:xfrm>
+          <a:prstGeom prst="rect">
+            <a:avLst/>
+          </a:prstGeom>
+        </p:spPr>
+      </p:pic>
     </p:spTree>
     <p:extLst>
       <p:ext uri="{BB962C8B-B14F-4D97-AF65-F5344CB8AC3E}">
-        <p14:creationId xmlns:p14="http://schemas.microsoft.com/office/powerpoint/2010/main" val="1305028121"/>
+        <p14:creationId xmlns:p14="http://schemas.microsoft.com/office/powerpoint/2010/main" val="817275800"/>
       </p:ext>
     </p:extLst>
   </p:cSld>

--- a/문제해결프로그래밍_숙제/제출용/숙제5_2022182035.pptx
+++ b/문제해결프로그래밍_숙제/제출용/숙제5_2022182035.pptx
@@ -5,7 +5,7 @@
     <p:sldMasterId id="2147483670" r:id="rId1"/>
   </p:sldMasterIdLst>
   <p:notesMasterIdLst>
-    <p:notesMasterId r:id="rId7"/>
+    <p:notesMasterId r:id="rId9"/>
   </p:notesMasterIdLst>
   <p:sldIdLst>
     <p:sldId id="256" r:id="rId2"/>
@@ -13,21 +13,28 @@
     <p:sldId id="258" r:id="rId4"/>
     <p:sldId id="259" r:id="rId5"/>
     <p:sldId id="260" r:id="rId6"/>
+    <p:sldId id="261" r:id="rId7"/>
+    <p:sldId id="262" r:id="rId8"/>
   </p:sldIdLst>
   <p:sldSz cx="9144000" cy="5143500" type="screen16x9"/>
   <p:notesSz cx="6858000" cy="9144000"/>
   <p:embeddedFontLst>
     <p:embeddedFont>
+      <p:font typeface="맑은 고딕" panose="020B0503020000020004" pitchFamily="50" charset="-127"/>
+      <p:regular r:id="rId10"/>
+      <p:bold r:id="rId11"/>
+    </p:embeddedFont>
+    <p:embeddedFont>
       <p:font typeface="Jost" panose="020B0600000101010101" charset="0"/>
-      <p:regular r:id="rId8"/>
-      <p:bold r:id="rId9"/>
-      <p:italic r:id="rId10"/>
-      <p:boldItalic r:id="rId11"/>
+      <p:regular r:id="rId12"/>
+      <p:bold r:id="rId13"/>
+      <p:italic r:id="rId14"/>
+      <p:boldItalic r:id="rId15"/>
     </p:embeddedFont>
     <p:embeddedFont>
       <p:font typeface="Palanquin Dark" panose="020B0600000101010101" charset="0"/>
-      <p:regular r:id="rId12"/>
-      <p:bold r:id="rId13"/>
+      <p:regular r:id="rId16"/>
+      <p:bold r:id="rId17"/>
     </p:embeddedFont>
   </p:embeddedFontLst>
   <p:defaultTextStyle>
@@ -1322,6 +1329,260 @@
     <p:extLst>
       <p:ext uri="{BB962C8B-B14F-4D97-AF65-F5344CB8AC3E}">
         <p14:creationId xmlns:p14="http://schemas.microsoft.com/office/powerpoint/2010/main" val="682162643"/>
+      </p:ext>
+    </p:extLst>
+  </p:cSld>
+  <p:clrMapOvr>
+    <a:masterClrMapping/>
+  </p:clrMapOvr>
+</p:notes>
+</file>
+
+<file path=ppt/notesSlides/notesSlide6.xml><?xml version="1.0" encoding="utf-8"?>
+<p:notes xmlns:a="http://schemas.openxmlformats.org/drawingml/2006/main" xmlns:r="http://schemas.openxmlformats.org/officeDocument/2006/relationships" xmlns:p="http://schemas.openxmlformats.org/presentationml/2006/main" showMasterSp="0" showMasterPhAnim="0">
+  <p:cSld>
+    <p:spTree>
+      <p:nvGrpSpPr>
+        <p:cNvPr id="1" name="Shape 431">
+          <a:extLst>
+            <a:ext uri="{FF2B5EF4-FFF2-40B4-BE49-F238E27FC236}">
+              <a16:creationId xmlns:a16="http://schemas.microsoft.com/office/drawing/2014/main" id="{4524EC07-7447-369A-A161-26DB1130617C}"/>
+            </a:ext>
+          </a:extLst>
+        </p:cNvPr>
+        <p:cNvGrpSpPr/>
+        <p:nvPr/>
+      </p:nvGrpSpPr>
+      <p:grpSpPr>
+        <a:xfrm>
+          <a:off x="0" y="0"/>
+          <a:ext cx="0" cy="0"/>
+          <a:chOff x="0" y="0"/>
+          <a:chExt cx="0" cy="0"/>
+        </a:xfrm>
+      </p:grpSpPr>
+      <p:sp>
+        <p:nvSpPr>
+          <p:cNvPr id="432" name="Google Shape;432;g3cf4798b604_0_426:notes">
+            <a:extLst>
+              <a:ext uri="{FF2B5EF4-FFF2-40B4-BE49-F238E27FC236}">
+                <a16:creationId xmlns:a16="http://schemas.microsoft.com/office/drawing/2014/main" id="{74C20E70-9215-C42C-90D1-F4C479217E65}"/>
+              </a:ext>
+            </a:extLst>
+          </p:cNvPr>
+          <p:cNvSpPr>
+            <a:spLocks noGrp="1" noRot="1" noChangeAspect="1"/>
+          </p:cNvSpPr>
+          <p:nvPr>
+            <p:ph type="sldImg" idx="2"/>
+          </p:nvPr>
+        </p:nvSpPr>
+        <p:spPr>
+          <a:xfrm>
+            <a:off x="381000" y="685800"/>
+            <a:ext cx="6096000" cy="3429000"/>
+          </a:xfrm>
+          <a:custGeom>
+            <a:avLst/>
+            <a:gdLst/>
+            <a:ahLst/>
+            <a:cxnLst/>
+            <a:rect l="l" t="t" r="r" b="b"/>
+            <a:pathLst>
+              <a:path w="120000" h="120000" extrusionOk="0">
+                <a:moveTo>
+                  <a:pt x="0" y="0"/>
+                </a:moveTo>
+                <a:lnTo>
+                  <a:pt x="120000" y="0"/>
+                </a:lnTo>
+                <a:lnTo>
+                  <a:pt x="120000" y="120000"/>
+                </a:lnTo>
+                <a:lnTo>
+                  <a:pt x="0" y="120000"/>
+                </a:lnTo>
+                <a:close/>
+              </a:path>
+            </a:pathLst>
+          </a:custGeom>
+        </p:spPr>
+      </p:sp>
+      <p:sp>
+        <p:nvSpPr>
+          <p:cNvPr id="433" name="Google Shape;433;g3cf4798b604_0_426:notes">
+            <a:extLst>
+              <a:ext uri="{FF2B5EF4-FFF2-40B4-BE49-F238E27FC236}">
+                <a16:creationId xmlns:a16="http://schemas.microsoft.com/office/drawing/2014/main" id="{61C2C3D6-944E-151D-CFFE-5A88F2DC6A52}"/>
+              </a:ext>
+            </a:extLst>
+          </p:cNvPr>
+          <p:cNvSpPr txBox="1">
+            <a:spLocks noGrp="1"/>
+          </p:cNvSpPr>
+          <p:nvPr>
+            <p:ph type="body" idx="1"/>
+          </p:nvPr>
+        </p:nvSpPr>
+        <p:spPr>
+          <a:xfrm>
+            <a:off x="685800" y="4343400"/>
+            <a:ext cx="5486400" cy="4114800"/>
+          </a:xfrm>
+          <a:prstGeom prst="rect">
+            <a:avLst/>
+          </a:prstGeom>
+        </p:spPr>
+        <p:txBody>
+          <a:bodyPr spcFirstLastPara="1" wrap="square" lIns="91425" tIns="91425" rIns="91425" bIns="91425" anchor="t" anchorCtr="0">
+            <a:noAutofit/>
+          </a:bodyPr>
+          <a:lstStyle/>
+          <a:p>
+            <a:pPr marL="0" lvl="0" indent="0" algn="l" rtl="0">
+              <a:spcBef>
+                <a:spcPts val="0"/>
+              </a:spcBef>
+              <a:spcAft>
+                <a:spcPts val="0"/>
+              </a:spcAft>
+              <a:buNone/>
+            </a:pPr>
+            <a:endParaRPr/>
+          </a:p>
+        </p:txBody>
+      </p:sp>
+    </p:spTree>
+    <p:extLst>
+      <p:ext uri="{BB962C8B-B14F-4D97-AF65-F5344CB8AC3E}">
+        <p14:creationId xmlns:p14="http://schemas.microsoft.com/office/powerpoint/2010/main" val="3290951150"/>
+      </p:ext>
+    </p:extLst>
+  </p:cSld>
+  <p:clrMapOvr>
+    <a:masterClrMapping/>
+  </p:clrMapOvr>
+</p:notes>
+</file>
+
+<file path=ppt/notesSlides/notesSlide7.xml><?xml version="1.0" encoding="utf-8"?>
+<p:notes xmlns:a="http://schemas.openxmlformats.org/drawingml/2006/main" xmlns:r="http://schemas.openxmlformats.org/officeDocument/2006/relationships" xmlns:p="http://schemas.openxmlformats.org/presentationml/2006/main" showMasterSp="0" showMasterPhAnim="0">
+  <p:cSld>
+    <p:spTree>
+      <p:nvGrpSpPr>
+        <p:cNvPr id="1" name="Shape 431">
+          <a:extLst>
+            <a:ext uri="{FF2B5EF4-FFF2-40B4-BE49-F238E27FC236}">
+              <a16:creationId xmlns:a16="http://schemas.microsoft.com/office/drawing/2014/main" id="{1B158A48-3274-8344-31C9-C36A2A0ED891}"/>
+            </a:ext>
+          </a:extLst>
+        </p:cNvPr>
+        <p:cNvGrpSpPr/>
+        <p:nvPr/>
+      </p:nvGrpSpPr>
+      <p:grpSpPr>
+        <a:xfrm>
+          <a:off x="0" y="0"/>
+          <a:ext cx="0" cy="0"/>
+          <a:chOff x="0" y="0"/>
+          <a:chExt cx="0" cy="0"/>
+        </a:xfrm>
+      </p:grpSpPr>
+      <p:sp>
+        <p:nvSpPr>
+          <p:cNvPr id="432" name="Google Shape;432;g3cf4798b604_0_426:notes">
+            <a:extLst>
+              <a:ext uri="{FF2B5EF4-FFF2-40B4-BE49-F238E27FC236}">
+                <a16:creationId xmlns:a16="http://schemas.microsoft.com/office/drawing/2014/main" id="{C56F45E5-28CA-7389-72E5-39BEB005E0B1}"/>
+              </a:ext>
+            </a:extLst>
+          </p:cNvPr>
+          <p:cNvSpPr>
+            <a:spLocks noGrp="1" noRot="1" noChangeAspect="1"/>
+          </p:cNvSpPr>
+          <p:nvPr>
+            <p:ph type="sldImg" idx="2"/>
+          </p:nvPr>
+        </p:nvSpPr>
+        <p:spPr>
+          <a:xfrm>
+            <a:off x="381000" y="685800"/>
+            <a:ext cx="6096000" cy="3429000"/>
+          </a:xfrm>
+          <a:custGeom>
+            <a:avLst/>
+            <a:gdLst/>
+            <a:ahLst/>
+            <a:cxnLst/>
+            <a:rect l="l" t="t" r="r" b="b"/>
+            <a:pathLst>
+              <a:path w="120000" h="120000" extrusionOk="0">
+                <a:moveTo>
+                  <a:pt x="0" y="0"/>
+                </a:moveTo>
+                <a:lnTo>
+                  <a:pt x="120000" y="0"/>
+                </a:lnTo>
+                <a:lnTo>
+                  <a:pt x="120000" y="120000"/>
+                </a:lnTo>
+                <a:lnTo>
+                  <a:pt x="0" y="120000"/>
+                </a:lnTo>
+                <a:close/>
+              </a:path>
+            </a:pathLst>
+          </a:custGeom>
+        </p:spPr>
+      </p:sp>
+      <p:sp>
+        <p:nvSpPr>
+          <p:cNvPr id="433" name="Google Shape;433;g3cf4798b604_0_426:notes">
+            <a:extLst>
+              <a:ext uri="{FF2B5EF4-FFF2-40B4-BE49-F238E27FC236}">
+                <a16:creationId xmlns:a16="http://schemas.microsoft.com/office/drawing/2014/main" id="{800A1237-35E9-F174-3159-5D9414E9F15F}"/>
+              </a:ext>
+            </a:extLst>
+          </p:cNvPr>
+          <p:cNvSpPr txBox="1">
+            <a:spLocks noGrp="1"/>
+          </p:cNvSpPr>
+          <p:nvPr>
+            <p:ph type="body" idx="1"/>
+          </p:nvPr>
+        </p:nvSpPr>
+        <p:spPr>
+          <a:xfrm>
+            <a:off x="685800" y="4343400"/>
+            <a:ext cx="5486400" cy="4114800"/>
+          </a:xfrm>
+          <a:prstGeom prst="rect">
+            <a:avLst/>
+          </a:prstGeom>
+        </p:spPr>
+        <p:txBody>
+          <a:bodyPr spcFirstLastPara="1" wrap="square" lIns="91425" tIns="91425" rIns="91425" bIns="91425" anchor="t" anchorCtr="0">
+            <a:noAutofit/>
+          </a:bodyPr>
+          <a:lstStyle/>
+          <a:p>
+            <a:pPr marL="0" lvl="0" indent="0" algn="l" rtl="0">
+              <a:spcBef>
+                <a:spcPts val="0"/>
+              </a:spcBef>
+              <a:spcAft>
+                <a:spcPts val="0"/>
+              </a:spcAft>
+              <a:buNone/>
+            </a:pPr>
+            <a:endParaRPr/>
+          </a:p>
+        </p:txBody>
+      </p:sp>
+    </p:spTree>
+    <p:extLst>
+      <p:ext uri="{BB962C8B-B14F-4D97-AF65-F5344CB8AC3E}">
+        <p14:creationId xmlns:p14="http://schemas.microsoft.com/office/powerpoint/2010/main" val="3673607676"/>
       </p:ext>
     </p:extLst>
   </p:cSld>
@@ -34477,6 +34738,272 @@
 </p:sld>
 </file>
 
+<file path=ppt/slides/slide6.xml><?xml version="1.0" encoding="utf-8"?>
+<p:sld xmlns:a="http://schemas.openxmlformats.org/drawingml/2006/main" xmlns:r="http://schemas.openxmlformats.org/officeDocument/2006/relationships" xmlns:p="http://schemas.openxmlformats.org/presentationml/2006/main">
+  <p:cSld>
+    <p:spTree>
+      <p:nvGrpSpPr>
+        <p:cNvPr id="1" name="Shape 434">
+          <a:extLst>
+            <a:ext uri="{FF2B5EF4-FFF2-40B4-BE49-F238E27FC236}">
+              <a16:creationId xmlns:a16="http://schemas.microsoft.com/office/drawing/2014/main" id="{0A432188-C965-A783-C3E9-170D5A1E7A6A}"/>
+            </a:ext>
+          </a:extLst>
+        </p:cNvPr>
+        <p:cNvGrpSpPr/>
+        <p:nvPr/>
+      </p:nvGrpSpPr>
+      <p:grpSpPr>
+        <a:xfrm>
+          <a:off x="0" y="0"/>
+          <a:ext cx="0" cy="0"/>
+          <a:chOff x="0" y="0"/>
+          <a:chExt cx="0" cy="0"/>
+        </a:xfrm>
+      </p:grpSpPr>
+      <p:sp>
+        <p:nvSpPr>
+          <p:cNvPr id="435" name="Google Shape;435;p24">
+            <a:extLst>
+              <a:ext uri="{FF2B5EF4-FFF2-40B4-BE49-F238E27FC236}">
+                <a16:creationId xmlns:a16="http://schemas.microsoft.com/office/drawing/2014/main" id="{1AE6A9A2-D5DB-6C09-D508-5F4ED21603E2}"/>
+              </a:ext>
+            </a:extLst>
+          </p:cNvPr>
+          <p:cNvSpPr txBox="1">
+            <a:spLocks noGrp="1"/>
+          </p:cNvSpPr>
+          <p:nvPr>
+            <p:ph type="title"/>
+          </p:nvPr>
+        </p:nvSpPr>
+        <p:spPr>
+          <a:xfrm>
+            <a:off x="722388" y="362600"/>
+            <a:ext cx="7699200" cy="572700"/>
+          </a:xfrm>
+          <a:prstGeom prst="rect">
+            <a:avLst/>
+          </a:prstGeom>
+        </p:spPr>
+        <p:txBody>
+          <a:bodyPr spcFirstLastPara="1" wrap="square" lIns="91425" tIns="91425" rIns="91425" bIns="91425" anchor="t" anchorCtr="0">
+            <a:noAutofit/>
+          </a:bodyPr>
+          <a:lstStyle/>
+          <a:p>
+            <a:pPr marL="50800" lvl="0"/>
+            <a:r>
+              <a:rPr lang="en-US" dirty="0"/>
+              <a:t>6. </a:t>
+            </a:r>
+            <a:r>
+              <a:rPr lang="ko-KR" altLang="en-US" dirty="0"/>
+              <a:t>공유기 설치 </a:t>
+            </a:r>
+            <a:r>
+              <a:rPr lang="en-US" altLang="ko-KR" dirty="0">
+                <a:ea typeface="맑은 고딕"/>
+              </a:rPr>
+              <a:t>(</a:t>
+            </a:r>
+            <a:r>
+              <a:rPr lang="ko-KR" altLang="en-US" dirty="0">
+                <a:ea typeface="맑은 고딕"/>
+              </a:rPr>
+              <a:t>이분탐색</a:t>
+            </a:r>
+            <a:r>
+              <a:rPr lang="en-US" altLang="ko-KR" dirty="0">
+                <a:ea typeface="맑은 고딕"/>
+              </a:rPr>
+              <a:t>)</a:t>
+            </a:r>
+            <a:r>
+              <a:rPr lang="en-US" dirty="0"/>
+              <a:t> </a:t>
+            </a:r>
+            <a:endParaRPr dirty="0"/>
+          </a:p>
+        </p:txBody>
+      </p:sp>
+      <p:pic>
+        <p:nvPicPr>
+          <p:cNvPr id="3" name="그림 2">
+            <a:extLst>
+              <a:ext uri="{FF2B5EF4-FFF2-40B4-BE49-F238E27FC236}">
+                <a16:creationId xmlns:a16="http://schemas.microsoft.com/office/drawing/2014/main" id="{E15551B9-9E89-66E7-CFAD-B85799C545D6}"/>
+              </a:ext>
+            </a:extLst>
+          </p:cNvPr>
+          <p:cNvPicPr>
+            <a:picLocks noChangeAspect="1"/>
+          </p:cNvPicPr>
+          <p:nvPr/>
+        </p:nvPicPr>
+        <p:blipFill>
+          <a:blip r:embed="rId3"/>
+          <a:stretch>
+            <a:fillRect/>
+          </a:stretch>
+        </p:blipFill>
+        <p:spPr>
+          <a:xfrm>
+            <a:off x="3685926" y="1982318"/>
+            <a:ext cx="5118507" cy="2134083"/>
+          </a:xfrm>
+          <a:prstGeom prst="rect">
+            <a:avLst/>
+          </a:prstGeom>
+        </p:spPr>
+      </p:pic>
+      <p:pic>
+        <p:nvPicPr>
+          <p:cNvPr id="5" name="그림 4">
+            <a:extLst>
+              <a:ext uri="{FF2B5EF4-FFF2-40B4-BE49-F238E27FC236}">
+                <a16:creationId xmlns:a16="http://schemas.microsoft.com/office/drawing/2014/main" id="{DE14E380-C715-D08C-88E7-4940FB7B0CFB}"/>
+              </a:ext>
+            </a:extLst>
+          </p:cNvPr>
+          <p:cNvPicPr>
+            <a:picLocks noChangeAspect="1"/>
+          </p:cNvPicPr>
+          <p:nvPr/>
+        </p:nvPicPr>
+        <p:blipFill>
+          <a:blip r:embed="rId4"/>
+          <a:stretch>
+            <a:fillRect/>
+          </a:stretch>
+        </p:blipFill>
+        <p:spPr>
+          <a:xfrm>
+            <a:off x="942824" y="1218762"/>
+            <a:ext cx="2370330" cy="3661193"/>
+          </a:xfrm>
+          <a:prstGeom prst="rect">
+            <a:avLst/>
+          </a:prstGeom>
+        </p:spPr>
+      </p:pic>
+    </p:spTree>
+    <p:extLst>
+      <p:ext uri="{BB962C8B-B14F-4D97-AF65-F5344CB8AC3E}">
+        <p14:creationId xmlns:p14="http://schemas.microsoft.com/office/powerpoint/2010/main" val="1293122912"/>
+      </p:ext>
+    </p:extLst>
+  </p:cSld>
+  <p:clrMapOvr>
+    <a:masterClrMapping/>
+  </p:clrMapOvr>
+</p:sld>
+</file>
+
+<file path=ppt/slides/slide7.xml><?xml version="1.0" encoding="utf-8"?>
+<p:sld xmlns:a="http://schemas.openxmlformats.org/drawingml/2006/main" xmlns:r="http://schemas.openxmlformats.org/officeDocument/2006/relationships" xmlns:p="http://schemas.openxmlformats.org/presentationml/2006/main">
+  <p:cSld>
+    <p:spTree>
+      <p:nvGrpSpPr>
+        <p:cNvPr id="1" name="Shape 434">
+          <a:extLst>
+            <a:ext uri="{FF2B5EF4-FFF2-40B4-BE49-F238E27FC236}">
+              <a16:creationId xmlns:a16="http://schemas.microsoft.com/office/drawing/2014/main" id="{6B85D0CE-7D8D-1618-ED92-A20364FA117D}"/>
+            </a:ext>
+          </a:extLst>
+        </p:cNvPr>
+        <p:cNvGrpSpPr/>
+        <p:nvPr/>
+      </p:nvGrpSpPr>
+      <p:grpSpPr>
+        <a:xfrm>
+          <a:off x="0" y="0"/>
+          <a:ext cx="0" cy="0"/>
+          <a:chOff x="0" y="0"/>
+          <a:chExt cx="0" cy="0"/>
+        </a:xfrm>
+      </p:grpSpPr>
+      <p:sp>
+        <p:nvSpPr>
+          <p:cNvPr id="435" name="Google Shape;435;p24">
+            <a:extLst>
+              <a:ext uri="{FF2B5EF4-FFF2-40B4-BE49-F238E27FC236}">
+                <a16:creationId xmlns:a16="http://schemas.microsoft.com/office/drawing/2014/main" id="{75403841-EC49-69FE-8118-9DA7709685F9}"/>
+              </a:ext>
+            </a:extLst>
+          </p:cNvPr>
+          <p:cNvSpPr txBox="1">
+            <a:spLocks noGrp="1"/>
+          </p:cNvSpPr>
+          <p:nvPr>
+            <p:ph type="title"/>
+          </p:nvPr>
+        </p:nvSpPr>
+        <p:spPr>
+          <a:xfrm>
+            <a:off x="722388" y="362600"/>
+            <a:ext cx="7699200" cy="572700"/>
+          </a:xfrm>
+          <a:prstGeom prst="rect">
+            <a:avLst/>
+          </a:prstGeom>
+        </p:spPr>
+        <p:txBody>
+          <a:bodyPr spcFirstLastPara="1" wrap="square" lIns="91425" tIns="91425" rIns="91425" bIns="91425" anchor="t" anchorCtr="0">
+            <a:noAutofit/>
+          </a:bodyPr>
+          <a:lstStyle/>
+          <a:p>
+            <a:pPr marL="50800" lvl="0" algn="ctr" rtl="0">
+              <a:spcBef>
+                <a:spcPts val="0"/>
+              </a:spcBef>
+              <a:spcAft>
+                <a:spcPts val="0"/>
+              </a:spcAft>
+              <a:buSzPts val="2800"/>
+            </a:pPr>
+            <a:r>
+              <a:rPr lang="en-US" dirty="0"/>
+              <a:t>7. </a:t>
+            </a:r>
+            <a:r>
+              <a:rPr lang="ko-KR" altLang="en-US" dirty="0"/>
+              <a:t>예산 </a:t>
+            </a:r>
+            <a:r>
+              <a:rPr lang="en-US" altLang="ko-KR" dirty="0"/>
+              <a:t>(</a:t>
+            </a:r>
+            <a:r>
+              <a:rPr lang="ko-KR" altLang="en-US" dirty="0"/>
+              <a:t>이분탐색</a:t>
+            </a:r>
+            <a:r>
+              <a:rPr lang="en-US" altLang="ko-KR"/>
+              <a:t>)</a:t>
+            </a:r>
+            <a:r>
+              <a:rPr lang="en-US"/>
+              <a:t> </a:t>
+            </a:r>
+            <a:endParaRPr dirty="0"/>
+          </a:p>
+        </p:txBody>
+      </p:sp>
+    </p:spTree>
+    <p:extLst>
+      <p:ext uri="{BB962C8B-B14F-4D97-AF65-F5344CB8AC3E}">
+        <p14:creationId xmlns:p14="http://schemas.microsoft.com/office/powerpoint/2010/main" val="4156845715"/>
+      </p:ext>
+    </p:extLst>
+  </p:cSld>
+  <p:clrMapOvr>
+    <a:masterClrMapping/>
+  </p:clrMapOvr>
+</p:sld>
+</file>
+
 <file path=ppt/theme/theme1.xml><?xml version="1.0" encoding="utf-8"?>
 <a:theme xmlns:a="http://schemas.openxmlformats.org/drawingml/2006/main" name="Linic by Slidesgo">
   <a:themeElements>

--- a/문제해결프로그래밍_숙제/제출용/숙제5_2022182035.pptx
+++ b/문제해결프로그래밍_숙제/제출용/숙제5_2022182035.pptx
@@ -20,19 +20,19 @@
   <p:notesSz cx="6858000" cy="9144000"/>
   <p:embeddedFontLst>
     <p:embeddedFont>
-      <p:font typeface="맑은 고딕" panose="020B0503020000020004" pitchFamily="50" charset="-127"/>
+      <p:font typeface="Jost" panose="020B0600000101010101" charset="0"/>
       <p:regular r:id="rId10"/>
       <p:bold r:id="rId11"/>
-    </p:embeddedFont>
-    <p:embeddedFont>
-      <p:font typeface="Jost" panose="020B0600000101010101" charset="0"/>
-      <p:regular r:id="rId12"/>
-      <p:bold r:id="rId13"/>
-      <p:italic r:id="rId14"/>
-      <p:boldItalic r:id="rId15"/>
+      <p:italic r:id="rId12"/>
+      <p:boldItalic r:id="rId13"/>
     </p:embeddedFont>
     <p:embeddedFont>
       <p:font typeface="Palanquin Dark" panose="020B0600000101010101" charset="0"/>
+      <p:regular r:id="rId14"/>
+      <p:bold r:id="rId15"/>
+    </p:embeddedFont>
+    <p:embeddedFont>
+      <p:font typeface="맑은 고딕" panose="020B0503020000020004" pitchFamily="50" charset="-127"/>
       <p:regular r:id="rId16"/>
       <p:bold r:id="rId17"/>
     </p:embeddedFont>
@@ -34187,10 +34187,97 @@
               <a:buSzPts val="2800"/>
               <a:buAutoNum type="arabicPeriod"/>
             </a:pPr>
+            <a:r>
+              <a:rPr lang="ko-KR" altLang="en-US" sz="2800" dirty="0"/>
+              <a:t>나무 자르기 </a:t>
+            </a:r>
+            <a:r>
+              <a:rPr lang="en-US" altLang="ko-KR" sz="2800" dirty="0"/>
+              <a:t>(TUKorea0070,</a:t>
+            </a:r>
+            <a:r>
+              <a:rPr lang="ko-KR" altLang="en-US" sz="2800" dirty="0"/>
+              <a:t>백준</a:t>
+            </a:r>
+            <a:r>
+              <a:rPr lang="en-US" altLang="ko-KR" sz="2800" dirty="0"/>
+              <a:t>, </a:t>
+            </a:r>
+            <a:r>
+              <a:rPr lang="ko-KR" altLang="en-US" sz="2800" dirty="0"/>
+              <a:t>이분탐색</a:t>
+            </a:r>
+            <a:r>
+              <a:rPr lang="en-US" altLang="ko-KR" sz="2800" dirty="0"/>
+              <a:t>)</a:t>
+            </a:r>
+            <a:br>
+              <a:rPr lang="en-US" altLang="ko-KR" sz="2800" dirty="0"/>
+            </a:br>
             <a:endParaRPr dirty="0"/>
           </a:p>
         </p:txBody>
       </p:sp>
+      <p:pic>
+        <p:nvPicPr>
+          <p:cNvPr id="3" name="그림 2">
+            <a:extLst>
+              <a:ext uri="{FF2B5EF4-FFF2-40B4-BE49-F238E27FC236}">
+                <a16:creationId xmlns:a16="http://schemas.microsoft.com/office/drawing/2014/main" id="{1636CC9F-AD32-6D1C-7D7C-03C33B14A4CD}"/>
+              </a:ext>
+            </a:extLst>
+          </p:cNvPr>
+          <p:cNvPicPr>
+            <a:picLocks noChangeAspect="1"/>
+          </p:cNvPicPr>
+          <p:nvPr/>
+        </p:nvPicPr>
+        <p:blipFill>
+          <a:blip r:embed="rId3"/>
+          <a:stretch>
+            <a:fillRect/>
+          </a:stretch>
+        </p:blipFill>
+        <p:spPr>
+          <a:xfrm>
+            <a:off x="4318157" y="1456354"/>
+            <a:ext cx="3769764" cy="2803491"/>
+          </a:xfrm>
+          <a:prstGeom prst="rect">
+            <a:avLst/>
+          </a:prstGeom>
+        </p:spPr>
+      </p:pic>
+      <p:pic>
+        <p:nvPicPr>
+          <p:cNvPr id="5" name="그림 4">
+            <a:extLst>
+              <a:ext uri="{FF2B5EF4-FFF2-40B4-BE49-F238E27FC236}">
+                <a16:creationId xmlns:a16="http://schemas.microsoft.com/office/drawing/2014/main" id="{C8C64EFD-41CB-C1BE-DCC0-D0B275CCD035}"/>
+              </a:ext>
+            </a:extLst>
+          </p:cNvPr>
+          <p:cNvPicPr>
+            <a:picLocks noChangeAspect="1"/>
+          </p:cNvPicPr>
+          <p:nvPr/>
+        </p:nvPicPr>
+        <p:blipFill>
+          <a:blip r:embed="rId4"/>
+          <a:stretch>
+            <a:fillRect/>
+          </a:stretch>
+        </p:blipFill>
+        <p:spPr>
+          <a:xfrm>
+            <a:off x="1707868" y="935300"/>
+            <a:ext cx="2276623" cy="3845600"/>
+          </a:xfrm>
+          <a:prstGeom prst="rect">
+            <a:avLst/>
+          </a:prstGeom>
+        </p:spPr>
+      </p:pic>
     </p:spTree>
   </p:cSld>
   <p:clrMapOvr>
@@ -34438,10 +34525,90 @@
               <a:rPr lang="en-US" dirty="0"/>
               <a:t>3. </a:t>
             </a:r>
+            <a:r>
+              <a:rPr lang="fr-FR" altLang="ko-KR" sz="2800" dirty="0"/>
+              <a:t>Postfix </a:t>
+            </a:r>
+            <a:r>
+              <a:rPr lang="ko-KR" altLang="fr-FR" sz="2800" dirty="0"/>
+              <a:t>표현식 </a:t>
+            </a:r>
+            <a:r>
+              <a:rPr lang="fr-FR" altLang="ko-KR" sz="2800" dirty="0"/>
+              <a:t>(TUKorea, </a:t>
+            </a:r>
+            <a:r>
+              <a:rPr lang="ko-KR" altLang="en-US" sz="2800" dirty="0"/>
+              <a:t>스택</a:t>
+            </a:r>
+            <a:r>
+              <a:rPr lang="fr-FR" altLang="ko-KR" sz="2800" dirty="0"/>
+              <a:t>) </a:t>
+            </a:r>
             <a:endParaRPr dirty="0"/>
           </a:p>
         </p:txBody>
       </p:sp>
+      <p:pic>
+        <p:nvPicPr>
+          <p:cNvPr id="3" name="그림 2">
+            <a:extLst>
+              <a:ext uri="{FF2B5EF4-FFF2-40B4-BE49-F238E27FC236}">
+                <a16:creationId xmlns:a16="http://schemas.microsoft.com/office/drawing/2014/main" id="{573F89A5-6E38-8242-30F1-8B7556392DD2}"/>
+              </a:ext>
+            </a:extLst>
+          </p:cNvPr>
+          <p:cNvPicPr>
+            <a:picLocks noChangeAspect="1"/>
+          </p:cNvPicPr>
+          <p:nvPr/>
+        </p:nvPicPr>
+        <p:blipFill>
+          <a:blip r:embed="rId3"/>
+          <a:stretch>
+            <a:fillRect/>
+          </a:stretch>
+        </p:blipFill>
+        <p:spPr>
+          <a:xfrm>
+            <a:off x="1431465" y="942218"/>
+            <a:ext cx="2587875" cy="3838682"/>
+          </a:xfrm>
+          <a:prstGeom prst="rect">
+            <a:avLst/>
+          </a:prstGeom>
+        </p:spPr>
+      </p:pic>
+      <p:pic>
+        <p:nvPicPr>
+          <p:cNvPr id="5" name="그림 4">
+            <a:extLst>
+              <a:ext uri="{FF2B5EF4-FFF2-40B4-BE49-F238E27FC236}">
+                <a16:creationId xmlns:a16="http://schemas.microsoft.com/office/drawing/2014/main" id="{C7E465F6-AF76-AD56-B585-0C3AA5A9F9F0}"/>
+              </a:ext>
+            </a:extLst>
+          </p:cNvPr>
+          <p:cNvPicPr>
+            <a:picLocks noChangeAspect="1"/>
+          </p:cNvPicPr>
+          <p:nvPr/>
+        </p:nvPicPr>
+        <p:blipFill>
+          <a:blip r:embed="rId4"/>
+          <a:stretch>
+            <a:fillRect/>
+          </a:stretch>
+        </p:blipFill>
+        <p:spPr>
+          <a:xfrm>
+            <a:off x="4137265" y="1304064"/>
+            <a:ext cx="4284323" cy="3114989"/>
+          </a:xfrm>
+          <a:prstGeom prst="rect">
+            <a:avLst/>
+          </a:prstGeom>
+        </p:spPr>
+      </p:pic>
     </p:spTree>
     <p:extLst>
       <p:ext uri="{BB962C8B-B14F-4D97-AF65-F5344CB8AC3E}">
@@ -34522,10 +34689,88 @@
               <a:rPr lang="en-US" dirty="0"/>
               <a:t>4. </a:t>
             </a:r>
+            <a:r>
+              <a:rPr lang="ko-KR" altLang="en-US" sz="2800" dirty="0"/>
+              <a:t>비밀지도</a:t>
+            </a:r>
+            <a:r>
+              <a:rPr lang="en-US" altLang="ko-KR" sz="2800" dirty="0"/>
+              <a:t>(Programmers, </a:t>
+            </a:r>
+            <a:r>
+              <a:rPr lang="ko-KR" altLang="en-US" sz="2800" dirty="0"/>
+              <a:t>구현</a:t>
+            </a:r>
+            <a:r>
+              <a:rPr lang="en-US" altLang="ko-KR" sz="2800" dirty="0"/>
+              <a:t>) </a:t>
+            </a:r>
+            <a:r>
+              <a:rPr lang="en-US" dirty="0"/>
+              <a:t> </a:t>
+            </a:r>
             <a:endParaRPr dirty="0"/>
           </a:p>
         </p:txBody>
       </p:sp>
+      <p:pic>
+        <p:nvPicPr>
+          <p:cNvPr id="3" name="그림 2">
+            <a:extLst>
+              <a:ext uri="{FF2B5EF4-FFF2-40B4-BE49-F238E27FC236}">
+                <a16:creationId xmlns:a16="http://schemas.microsoft.com/office/drawing/2014/main" id="{662324FF-86DD-34EE-F989-E497B115E7CD}"/>
+              </a:ext>
+            </a:extLst>
+          </p:cNvPr>
+          <p:cNvPicPr>
+            <a:picLocks noChangeAspect="1"/>
+          </p:cNvPicPr>
+          <p:nvPr/>
+        </p:nvPicPr>
+        <p:blipFill>
+          <a:blip r:embed="rId3"/>
+          <a:srcRect b="39943"/>
+          <a:stretch/>
+        </p:blipFill>
+        <p:spPr>
+          <a:xfrm>
+            <a:off x="1195627" y="1114432"/>
+            <a:ext cx="2989120" cy="3561309"/>
+          </a:xfrm>
+          <a:prstGeom prst="rect">
+            <a:avLst/>
+          </a:prstGeom>
+        </p:spPr>
+      </p:pic>
+      <p:pic>
+        <p:nvPicPr>
+          <p:cNvPr id="4" name="그림 3">
+            <a:extLst>
+              <a:ext uri="{FF2B5EF4-FFF2-40B4-BE49-F238E27FC236}">
+                <a16:creationId xmlns:a16="http://schemas.microsoft.com/office/drawing/2014/main" id="{8B2B4345-EADE-E537-0032-902B87E30271}"/>
+              </a:ext>
+            </a:extLst>
+          </p:cNvPr>
+          <p:cNvPicPr>
+            <a:picLocks noChangeAspect="1"/>
+          </p:cNvPicPr>
+          <p:nvPr/>
+        </p:nvPicPr>
+        <p:blipFill>
+          <a:blip r:embed="rId3"/>
+          <a:srcRect t="60252"/>
+          <a:stretch/>
+        </p:blipFill>
+        <p:spPr>
+          <a:xfrm>
+            <a:off x="4571988" y="1607732"/>
+            <a:ext cx="3265243" cy="2574707"/>
+          </a:xfrm>
+          <a:prstGeom prst="rect">
+            <a:avLst/>
+          </a:prstGeom>
+        </p:spPr>
+      </p:pic>
     </p:spTree>
     <p:extLst>
       <p:ext uri="{BB962C8B-B14F-4D97-AF65-F5344CB8AC3E}">
@@ -34991,6 +35236,66 @@
           </a:p>
         </p:txBody>
       </p:sp>
+      <p:pic>
+        <p:nvPicPr>
+          <p:cNvPr id="3" name="그림 2">
+            <a:extLst>
+              <a:ext uri="{FF2B5EF4-FFF2-40B4-BE49-F238E27FC236}">
+                <a16:creationId xmlns:a16="http://schemas.microsoft.com/office/drawing/2014/main" id="{C377804C-E5B5-3B09-CA68-26128FE51E69}"/>
+              </a:ext>
+            </a:extLst>
+          </p:cNvPr>
+          <p:cNvPicPr>
+            <a:picLocks noChangeAspect="1"/>
+          </p:cNvPicPr>
+          <p:nvPr/>
+        </p:nvPicPr>
+        <p:blipFill>
+          <a:blip r:embed="rId3"/>
+          <a:stretch>
+            <a:fillRect/>
+          </a:stretch>
+        </p:blipFill>
+        <p:spPr>
+          <a:xfrm>
+            <a:off x="4056570" y="2179783"/>
+            <a:ext cx="4455453" cy="1367363"/>
+          </a:xfrm>
+          <a:prstGeom prst="rect">
+            <a:avLst/>
+          </a:prstGeom>
+        </p:spPr>
+      </p:pic>
+      <p:pic>
+        <p:nvPicPr>
+          <p:cNvPr id="5" name="그림 4">
+            <a:extLst>
+              <a:ext uri="{FF2B5EF4-FFF2-40B4-BE49-F238E27FC236}">
+                <a16:creationId xmlns:a16="http://schemas.microsoft.com/office/drawing/2014/main" id="{0630CAA1-7F6E-5CC7-07CA-9D241696CAE0}"/>
+              </a:ext>
+            </a:extLst>
+          </p:cNvPr>
+          <p:cNvPicPr>
+            <a:picLocks noChangeAspect="1"/>
+          </p:cNvPicPr>
+          <p:nvPr/>
+        </p:nvPicPr>
+        <p:blipFill>
+          <a:blip r:embed="rId4"/>
+          <a:stretch>
+            <a:fillRect/>
+          </a:stretch>
+        </p:blipFill>
+        <p:spPr>
+          <a:xfrm>
+            <a:off x="1369105" y="1045027"/>
+            <a:ext cx="2412125" cy="3636876"/>
+          </a:xfrm>
+          <a:prstGeom prst="rect">
+            <a:avLst/>
+          </a:prstGeom>
+        </p:spPr>
+      </p:pic>
     </p:spTree>
     <p:extLst>
       <p:ext uri="{BB962C8B-B14F-4D97-AF65-F5344CB8AC3E}">
